--- a/Slides/Week01/02：NLP的基本單位.pptx
+++ b/Slides/Week01/02：NLP的基本單位.pptx
@@ -212,7 +212,7 @@
           <a:p>
             <a:fld id="{16063FEA-A760-4B54-9DA9-8374087E77C1}" type="datetimeFigureOut">
               <a:rPr lang="zh-TW" altLang="en-US" smtClean="0"/>
-              <a:t>2024/11/12</a:t>
+              <a:t>2024/11/13</a:t>
             </a:fld>
             <a:endParaRPr lang="zh-TW" altLang="en-US"/>
           </a:p>
@@ -2265,7 +2265,7 @@
           <a:p>
             <a:fld id="{3AC75911-2E58-43BD-A4D9-048351808CE1}" type="datetimeFigureOut">
               <a:rPr lang="zh-TW" altLang="en-US" smtClean="0"/>
-              <a:t>2024/11/12</a:t>
+              <a:t>2024/11/13</a:t>
             </a:fld>
             <a:endParaRPr lang="zh-TW" altLang="en-US"/>
           </a:p>
@@ -2463,7 +2463,7 @@
           <a:p>
             <a:fld id="{3AC75911-2E58-43BD-A4D9-048351808CE1}" type="datetimeFigureOut">
               <a:rPr lang="zh-TW" altLang="en-US" smtClean="0"/>
-              <a:t>2024/11/12</a:t>
+              <a:t>2024/11/13</a:t>
             </a:fld>
             <a:endParaRPr lang="zh-TW" altLang="en-US"/>
           </a:p>
@@ -2671,7 +2671,7 @@
           <a:p>
             <a:fld id="{3AC75911-2E58-43BD-A4D9-048351808CE1}" type="datetimeFigureOut">
               <a:rPr lang="zh-TW" altLang="en-US" smtClean="0"/>
-              <a:t>2024/11/12</a:t>
+              <a:t>2024/11/13</a:t>
             </a:fld>
             <a:endParaRPr lang="zh-TW" altLang="en-US"/>
           </a:p>
@@ -3052,7 +3052,7 @@
                 </a:solidFill>
               </a:rPr>
               <a:pPr/>
-              <a:t>11/12/2024</a:t>
+              <a:t>11/13/2024</a:t>
             </a:fld>
             <a:endParaRPr kumimoji="0" lang="en-US" dirty="0"/>
           </a:p>
@@ -3283,7 +3283,7 @@
                 </a:solidFill>
               </a:rPr>
               <a:pPr/>
-              <a:t>11/12/2024</a:t>
+              <a:t>11/13/2024</a:t>
             </a:fld>
             <a:endParaRPr kumimoji="0" lang="en-US" dirty="0"/>
           </a:p>
@@ -3516,7 +3516,7 @@
                 </a:solidFill>
               </a:rPr>
               <a:pPr/>
-              <a:t>11/12/2024</a:t>
+              <a:t>11/13/2024</a:t>
             </a:fld>
             <a:endParaRPr kumimoji="0" lang="en-US" dirty="0"/>
           </a:p>
@@ -3998,7 +3998,7 @@
                 </a:solidFill>
               </a:rPr>
               <a:pPr/>
-              <a:t>11/12/2024</a:t>
+              <a:t>11/13/2024</a:t>
             </a:fld>
             <a:endParaRPr kumimoji="0" lang="en-US" dirty="0"/>
           </a:p>
@@ -4355,7 +4355,7 @@
                 </a:solidFill>
               </a:rPr>
               <a:pPr/>
-              <a:t>11/12/2024</a:t>
+              <a:t>11/13/2024</a:t>
             </a:fld>
             <a:endParaRPr kumimoji="0" lang="en-US" dirty="0"/>
           </a:p>
@@ -4718,7 +4718,7 @@
                 </a:solidFill>
               </a:rPr>
               <a:pPr/>
-              <a:t>11/12/2024</a:t>
+              <a:t>11/13/2024</a:t>
             </a:fld>
             <a:endParaRPr kumimoji="0" lang="en-US" dirty="0"/>
           </a:p>
@@ -5028,7 +5028,7 @@
                 </a:solidFill>
               </a:rPr>
               <a:pPr/>
-              <a:t>11/12/2024</a:t>
+              <a:t>11/13/2024</a:t>
             </a:fld>
             <a:endParaRPr kumimoji="0" lang="en-US" dirty="0"/>
           </a:p>
@@ -5223,7 +5223,7 @@
           <a:p>
             <a:fld id="{3AC75911-2E58-43BD-A4D9-048351808CE1}" type="datetimeFigureOut">
               <a:rPr lang="zh-TW" altLang="en-US" smtClean="0"/>
-              <a:t>2024/11/12</a:t>
+              <a:t>2024/11/13</a:t>
             </a:fld>
             <a:endParaRPr lang="zh-TW" altLang="en-US"/>
           </a:p>
@@ -5707,7 +5707,7 @@
                 </a:solidFill>
               </a:rPr>
               <a:pPr/>
-              <a:t>11/12/2024</a:t>
+              <a:t>11/13/2024</a:t>
             </a:fld>
             <a:endParaRPr kumimoji="0" lang="en-US" dirty="0"/>
           </a:p>
@@ -6103,7 +6103,7 @@
                 </a:solidFill>
               </a:rPr>
               <a:pPr/>
-              <a:t>11/12/2024</a:t>
+              <a:t>11/13/2024</a:t>
             </a:fld>
             <a:endParaRPr kumimoji="0" lang="en-US" dirty="0"/>
           </a:p>
@@ -6443,7 +6443,7 @@
                 </a:solidFill>
               </a:rPr>
               <a:pPr/>
-              <a:t>11/12/2024</a:t>
+              <a:t>11/13/2024</a:t>
             </a:fld>
             <a:endParaRPr kumimoji="0" lang="en-US" dirty="0"/>
           </a:p>
@@ -7024,7 +7024,7 @@
                 </a:solidFill>
               </a:rPr>
               <a:pPr/>
-              <a:t>11/12/2024</a:t>
+              <a:t>11/13/2024</a:t>
             </a:fld>
             <a:endParaRPr kumimoji="0" lang="en-US" dirty="0"/>
           </a:p>
@@ -7593,7 +7593,7 @@
                 </a:solidFill>
               </a:rPr>
               <a:pPr/>
-              <a:t>11/12/2024</a:t>
+              <a:t>11/13/2024</a:t>
             </a:fld>
             <a:endParaRPr kumimoji="0" lang="en-US" dirty="0"/>
           </a:p>
@@ -8057,7 +8057,7 @@
                 </a:solidFill>
               </a:rPr>
               <a:pPr/>
-              <a:t>11/12/2024</a:t>
+              <a:t>11/13/2024</a:t>
             </a:fld>
             <a:endParaRPr kumimoji="0" lang="en-US" dirty="0"/>
           </a:p>
@@ -8486,7 +8486,7 @@
                 </a:solidFill>
               </a:rPr>
               <a:pPr/>
-              <a:t>11/12/2024</a:t>
+              <a:t>11/13/2024</a:t>
             </a:fld>
             <a:endParaRPr kumimoji="0" lang="en-US" dirty="0"/>
           </a:p>
@@ -8995,7 +8995,7 @@
                 </a:solidFill>
               </a:rPr>
               <a:pPr/>
-              <a:t>11/12/2024</a:t>
+              <a:t>11/13/2024</a:t>
             </a:fld>
             <a:endParaRPr kumimoji="0" lang="en-US" dirty="0"/>
           </a:p>
@@ -9504,7 +9504,7 @@
                 </a:solidFill>
               </a:rPr>
               <a:pPr/>
-              <a:t>11/12/2024</a:t>
+              <a:t>11/13/2024</a:t>
             </a:fld>
             <a:endParaRPr kumimoji="0" lang="en-US" dirty="0"/>
           </a:p>
@@ -9725,7 +9725,7 @@
                 </a:solidFill>
               </a:rPr>
               <a:pPr/>
-              <a:t>11/12/2024</a:t>
+              <a:t>11/13/2024</a:t>
             </a:fld>
             <a:endParaRPr kumimoji="0" lang="en-US" dirty="0"/>
           </a:p>
@@ -9997,7 +9997,7 @@
           <a:p>
             <a:fld id="{3AC75911-2E58-43BD-A4D9-048351808CE1}" type="datetimeFigureOut">
               <a:rPr lang="zh-TW" altLang="en-US" smtClean="0"/>
-              <a:t>2024/11/12</a:t>
+              <a:t>2024/11/13</a:t>
             </a:fld>
             <a:endParaRPr lang="zh-TW" altLang="en-US"/>
           </a:p>
@@ -10333,7 +10333,7 @@
                 </a:solidFill>
               </a:rPr>
               <a:pPr/>
-              <a:t>11/12/2024</a:t>
+              <a:t>11/13/2024</a:t>
             </a:fld>
             <a:endParaRPr kumimoji="0" lang="en-US" dirty="0"/>
           </a:p>
@@ -10557,7 +10557,7 @@
                 </a:solidFill>
               </a:rPr>
               <a:pPr/>
-              <a:t>11/12/2024</a:t>
+              <a:t>11/13/2024</a:t>
             </a:fld>
             <a:endParaRPr kumimoji="0" lang="en-US" dirty="0"/>
           </a:p>
@@ -10738,7 +10738,7 @@
             <a:fld id="{ACB2EC6F-6501-4E04-BD6C-A8A6CABB2C5B}" type="datetimeFigureOut">
               <a:rPr kumimoji="0" lang="en-US" smtClean="0"/>
               <a:pPr/>
-              <a:t>11/12/2024</a:t>
+              <a:t>11/13/2024</a:t>
             </a:fld>
             <a:endParaRPr kumimoji="0" lang="en-US" dirty="0"/>
           </a:p>
@@ -11022,7 +11022,7 @@
           <a:p>
             <a:fld id="{3AC75911-2E58-43BD-A4D9-048351808CE1}" type="datetimeFigureOut">
               <a:rPr lang="zh-TW" altLang="en-US" smtClean="0"/>
-              <a:t>2024/11/12</a:t>
+              <a:t>2024/11/13</a:t>
             </a:fld>
             <a:endParaRPr lang="zh-TW" altLang="en-US"/>
           </a:p>
@@ -11434,7 +11434,7 @@
           <a:p>
             <a:fld id="{3AC75911-2E58-43BD-A4D9-048351808CE1}" type="datetimeFigureOut">
               <a:rPr lang="zh-TW" altLang="en-US" smtClean="0"/>
-              <a:t>2024/11/12</a:t>
+              <a:t>2024/11/13</a:t>
             </a:fld>
             <a:endParaRPr lang="zh-TW" altLang="en-US"/>
           </a:p>
@@ -11575,7 +11575,7 @@
           <a:p>
             <a:fld id="{3AC75911-2E58-43BD-A4D9-048351808CE1}" type="datetimeFigureOut">
               <a:rPr lang="zh-TW" altLang="en-US" smtClean="0"/>
-              <a:t>2024/11/12</a:t>
+              <a:t>2024/11/13</a:t>
             </a:fld>
             <a:endParaRPr lang="zh-TW" altLang="en-US"/>
           </a:p>
@@ -11688,7 +11688,7 @@
           <a:p>
             <a:fld id="{3AC75911-2E58-43BD-A4D9-048351808CE1}" type="datetimeFigureOut">
               <a:rPr lang="zh-TW" altLang="en-US" smtClean="0"/>
-              <a:t>2024/11/12</a:t>
+              <a:t>2024/11/13</a:t>
             </a:fld>
             <a:endParaRPr lang="zh-TW" altLang="en-US"/>
           </a:p>
@@ -11999,7 +11999,7 @@
           <a:p>
             <a:fld id="{3AC75911-2E58-43BD-A4D9-048351808CE1}" type="datetimeFigureOut">
               <a:rPr lang="zh-TW" altLang="en-US" smtClean="0"/>
-              <a:t>2024/11/12</a:t>
+              <a:t>2024/11/13</a:t>
             </a:fld>
             <a:endParaRPr lang="zh-TW" altLang="en-US"/>
           </a:p>
@@ -12287,7 +12287,7 @@
           <a:p>
             <a:fld id="{3AC75911-2E58-43BD-A4D9-048351808CE1}" type="datetimeFigureOut">
               <a:rPr lang="zh-TW" altLang="en-US" smtClean="0"/>
-              <a:t>2024/11/12</a:t>
+              <a:t>2024/11/13</a:t>
             </a:fld>
             <a:endParaRPr lang="zh-TW" altLang="en-US"/>
           </a:p>
@@ -12528,7 +12528,7 @@
           <a:p>
             <a:fld id="{3AC75911-2E58-43BD-A4D9-048351808CE1}" type="datetimeFigureOut">
               <a:rPr lang="zh-TW" altLang="en-US" smtClean="0"/>
-              <a:t>2024/11/12</a:t>
+              <a:t>2024/11/13</a:t>
             </a:fld>
             <a:endParaRPr lang="zh-TW" altLang="en-US"/>
           </a:p>
@@ -13100,7 +13100,7 @@
                 </a:solidFill>
               </a:rPr>
               <a:pPr/>
-              <a:t>11/12/2024</a:t>
+              <a:t>11/13/2024</a:t>
             </a:fld>
             <a:endParaRPr kumimoji="0" lang="en-US" sz="1200" dirty="0">
               <a:solidFill>
